--- a/exports/pptx/lessons/primary-module-03-ayurveda-good-health/day-02-vata.pptx
+++ b/exports/pptx/lessons/primary-module-03-ayurveda-good-health/day-02-vata.pptx
@@ -15,9 +15,11 @@
     <p:sldId id="263" r:id="rId9"/>
     <p:sldId id="264" r:id="rId10"/>
     <p:sldId id="265" r:id="rId11"/>
+    <p:sldId id="266" r:id="rId12"/>
+    <p:sldId id="267" r:id="rId13"/>
   </p:sldIdLst>
   <p:notesMasterIdLst>
-    <p:notesMasterId r:id="rId12"/>
+    <p:notesMasterId r:id="rId14"/>
   </p:notesMasterIdLst>
   <p:sldSz cx="9144000" cy="5143500"/>
   <p:notesSz cx="5143500" cy="9144000"/>
@@ -623,6 +625,182 @@
             <a:fld id="{F7021451-1387-4CA6-816F-3879F97B5CBC}" type="slidenum">
               <a:rPr lang="en-US"/>
               <a:t>10</a:t>
+            </a:fld>
+            <a:endParaRPr lang="en-US"/>
+          </a:p>
+        </p:txBody>
+      </p:sp>
+    </p:spTree>
+    <p:extLst>
+      <p:ext uri="{BB962C8B-B14F-4D97-AF65-F5344CB8AC3E}">
+        <p14:creationId xmlns:p14="http://schemas.microsoft.com/office/powerpoint/2010/main" val="1024086991"/>
+      </p:ext>
+    </p:extLst>
+  </p:cSld>
+  <p:clrMapOvr>
+    <a:masterClrMapping/>
+  </p:clrMapOvr>
+</p:notes>
+</file>
+
+<file path=ppt/notesSlides/notesSlide11.xml><?xml version="1.0" encoding="utf-8"?>
+<p:notes xmlns:a="http://schemas.openxmlformats.org/drawingml/2006/main" xmlns:r="http://schemas.openxmlformats.org/officeDocument/2006/relationships" xmlns:p="http://schemas.openxmlformats.org/presentationml/2006/main">
+  <p:cSld>
+    <p:spTree>
+      <p:nvGrpSpPr>
+        <p:cNvPr id="1" name=""/>
+        <p:cNvGrpSpPr/>
+        <p:nvPr/>
+      </p:nvGrpSpPr>
+      <p:grpSpPr>
+        <a:xfrm>
+          <a:off x="0" y="0"/>
+          <a:ext cx="0" cy="0"/>
+          <a:chOff x="0" y="0"/>
+          <a:chExt cx="0" cy="0"/>
+        </a:xfrm>
+      </p:grpSpPr>
+      <p:sp>
+        <p:nvSpPr>
+          <p:cNvPr id="2" name="Slide Image Placeholder 1"/>
+          <p:cNvSpPr>
+            <a:spLocks noGrp="1" noRot="1" noChangeAspect="1"/>
+          </p:cNvSpPr>
+          <p:nvPr>
+            <p:ph type="sldImg"/>
+          </p:nvPr>
+        </p:nvSpPr>
+        <p:spPr/>
+      </p:sp>
+      <p:sp>
+        <p:nvSpPr>
+          <p:cNvPr id="3" name="Notes Placeholder 2"/>
+          <p:cNvSpPr>
+            <a:spLocks noGrp="1"/>
+          </p:cNvSpPr>
+          <p:nvPr>
+            <p:ph type="body" idx="1"/>
+          </p:nvPr>
+        </p:nvSpPr>
+        <p:spPr/>
+        <p:txBody>
+          <a:bodyPr/>
+          <a:lstStyle/>
+          <a:p>
+            <a:r>
+              <a:rPr lang="en-US" dirty="0"/>
+              <a:t/>
+            </a:r>
+            <a:endParaRPr lang="en-US" dirty="0"/>
+          </a:p>
+        </p:txBody>
+      </p:sp>
+      <p:sp>
+        <p:nvSpPr>
+          <p:cNvPr id="4" name="Slide Number Placeholder 3"/>
+          <p:cNvSpPr>
+            <a:spLocks noGrp="1"/>
+          </p:cNvSpPr>
+          <p:nvPr>
+            <p:ph type="sldNum" sz="quarter" idx="10"/>
+          </p:nvPr>
+        </p:nvSpPr>
+        <p:spPr/>
+        <p:txBody>
+          <a:bodyPr/>
+          <a:lstStyle/>
+          <a:p>
+            <a:fld id="{F7021451-1387-4CA6-816F-3879F97B5CBC}" type="slidenum">
+              <a:rPr lang="en-US"/>
+              <a:t>11</a:t>
+            </a:fld>
+            <a:endParaRPr lang="en-US"/>
+          </a:p>
+        </p:txBody>
+      </p:sp>
+    </p:spTree>
+    <p:extLst>
+      <p:ext uri="{BB962C8B-B14F-4D97-AF65-F5344CB8AC3E}">
+        <p14:creationId xmlns:p14="http://schemas.microsoft.com/office/powerpoint/2010/main" val="1024086991"/>
+      </p:ext>
+    </p:extLst>
+  </p:cSld>
+  <p:clrMapOvr>
+    <a:masterClrMapping/>
+  </p:clrMapOvr>
+</p:notes>
+</file>
+
+<file path=ppt/notesSlides/notesSlide12.xml><?xml version="1.0" encoding="utf-8"?>
+<p:notes xmlns:a="http://schemas.openxmlformats.org/drawingml/2006/main" xmlns:r="http://schemas.openxmlformats.org/officeDocument/2006/relationships" xmlns:p="http://schemas.openxmlformats.org/presentationml/2006/main">
+  <p:cSld>
+    <p:spTree>
+      <p:nvGrpSpPr>
+        <p:cNvPr id="1" name=""/>
+        <p:cNvGrpSpPr/>
+        <p:nvPr/>
+      </p:nvGrpSpPr>
+      <p:grpSpPr>
+        <a:xfrm>
+          <a:off x="0" y="0"/>
+          <a:ext cx="0" cy="0"/>
+          <a:chOff x="0" y="0"/>
+          <a:chExt cx="0" cy="0"/>
+        </a:xfrm>
+      </p:grpSpPr>
+      <p:sp>
+        <p:nvSpPr>
+          <p:cNvPr id="2" name="Slide Image Placeholder 1"/>
+          <p:cNvSpPr>
+            <a:spLocks noGrp="1" noRot="1" noChangeAspect="1"/>
+          </p:cNvSpPr>
+          <p:nvPr>
+            <p:ph type="sldImg"/>
+          </p:nvPr>
+        </p:nvSpPr>
+        <p:spPr/>
+      </p:sp>
+      <p:sp>
+        <p:nvSpPr>
+          <p:cNvPr id="3" name="Notes Placeholder 2"/>
+          <p:cNvSpPr>
+            <a:spLocks noGrp="1"/>
+          </p:cNvSpPr>
+          <p:nvPr>
+            <p:ph type="body" idx="1"/>
+          </p:nvPr>
+        </p:nvSpPr>
+        <p:spPr/>
+        <p:txBody>
+          <a:bodyPr/>
+          <a:lstStyle/>
+          <a:p>
+            <a:r>
+              <a:rPr lang="en-US" dirty="0"/>
+              <a:t/>
+            </a:r>
+            <a:endParaRPr lang="en-US" dirty="0"/>
+          </a:p>
+        </p:txBody>
+      </p:sp>
+      <p:sp>
+        <p:nvSpPr>
+          <p:cNvPr id="4" name="Slide Number Placeholder 3"/>
+          <p:cNvSpPr>
+            <a:spLocks noGrp="1"/>
+          </p:cNvSpPr>
+          <p:nvPr>
+            <p:ph type="sldNum" sz="quarter" idx="10"/>
+          </p:nvPr>
+        </p:nvSpPr>
+        <p:spPr/>
+        <p:txBody>
+          <a:bodyPr/>
+          <a:lstStyle/>
+          <a:p>
+            <a:fld id="{F7021451-1387-4CA6-816F-3879F97B5CBC}" type="slidenum">
+              <a:rPr lang="en-US"/>
+              <a:t>12</a:t>
             </a:fld>
             <a:endParaRPr lang="en-US"/>
           </a:p>
@@ -1876,102 +2054,6 @@
         </p:nvSpPr>
         <p:spPr>
           <a:xfrm>
-            <a:off x="406301" y="1223963"/>
-            <a:ext cx="8498026" cy="274290"/>
-          </a:xfrm>
-          <a:prstGeom prst="rect">
-            <a:avLst/>
-          </a:prstGeom>
-          <a:noFill/>
-          <a:ln/>
-        </p:spPr>
-        <p:txBody>
-          <a:bodyPr wrap="square" lIns="0" tIns="0" rIns="0" bIns="0" rtlCol="0" anchor="t"/>
-          <a:lstStyle/>
-          <a:p>
-            <a:pPr algn="l" indent="0" marL="0">
-              <a:lnSpc>
-                <a:spcPts val="2160"/>
-              </a:lnSpc>
-              <a:spcBef>
-                <a:spcPts val="600"/>
-              </a:spcBef>
-              <a:spcAft>
-                <a:spcPts val="800"/>
-              </a:spcAft>
-              <a:buNone/>
-            </a:pPr>
-            <a:r>
-              <a:rPr lang="en-US" sz="1800" b="1" dirty="0">
-                <a:solidFill>
-                  <a:srgbClr val="E07A5F"/>
-                </a:solidFill>
-                <a:latin typeface="Georgia" pitchFamily="34" charset="0"/>
-                <a:ea typeface="Georgia" pitchFamily="34" charset="-122"/>
-                <a:cs typeface="Georgia" pitchFamily="34" charset="-120"/>
-              </a:rPr>
-              <a:t>Goal</a:t>
-            </a:r>
-            <a:endParaRPr lang="en-US" sz="1800" dirty="0"/>
-          </a:p>
-        </p:txBody>
-      </p:sp>
-      <p:sp>
-        <p:nvSpPr>
-          <p:cNvPr id="6" name="Text 4"/>
-          <p:cNvSpPr/>
-          <p:nvPr/>
-        </p:nvSpPr>
-        <p:spPr>
-          <a:xfrm>
-            <a:off x="406301" y="1637854"/>
-            <a:ext cx="8498026" cy="213271"/>
-          </a:xfrm>
-          <a:prstGeom prst="rect">
-            <a:avLst/>
-          </a:prstGeom>
-          <a:noFill/>
-          <a:ln/>
-        </p:spPr>
-        <p:txBody>
-          <a:bodyPr wrap="square" lIns="0" tIns="0" rIns="0" bIns="0" rtlCol="0" anchor="t"/>
-          <a:lstStyle/>
-          <a:p>
-            <a:pPr algn="l" indent="0" marL="0">
-              <a:lnSpc>
-                <a:spcPts val="1680"/>
-              </a:lnSpc>
-              <a:spcBef>
-                <a:spcPts val="300"/>
-              </a:spcBef>
-              <a:spcAft>
-                <a:spcPts val="300"/>
-              </a:spcAft>
-              <a:buNone/>
-            </a:pPr>
-            <a:r>
-              <a:rPr lang="en-US" sz="1200" dirty="0">
-                <a:solidFill>
-                  <a:srgbClr val="2C2C2C"/>
-                </a:solidFill>
-                <a:latin typeface="Verdana" pitchFamily="34" charset="0"/>
-                <a:ea typeface="Verdana" pitchFamily="34" charset="-122"/>
-                <a:cs typeface="Verdana" pitchFamily="34" charset="-120"/>
-              </a:rPr>
-              <a:t>Children explore Vāta through movement and a game.</a:t>
-            </a:r>
-            <a:endParaRPr lang="en-US" sz="1200" dirty="0"/>
-          </a:p>
-        </p:txBody>
-      </p:sp>
-      <p:sp>
-        <p:nvSpPr>
-          <p:cNvPr id="7" name="Text 5"/>
-          <p:cNvSpPr/>
-          <p:nvPr/>
-        </p:nvSpPr>
-        <p:spPr>
-          <a:xfrm>
             <a:off x="406301" y="4434929"/>
             <a:ext cx="8498026" cy="213271"/>
           </a:xfrm>
@@ -2116,6 +2198,368 @@
                 <a:ea typeface="Georgia" pitchFamily="34" charset="-122"/>
                 <a:cs typeface="Georgia" pitchFamily="34" charset="-120"/>
               </a:rPr>
+              <a:t>Show + chant (2 min)</a:t>
+            </a:r>
+            <a:endParaRPr lang="en-US" sz="1800" dirty="0"/>
+          </a:p>
+        </p:txBody>
+      </p:sp>
+      <p:sp>
+        <p:nvSpPr>
+          <p:cNvPr id="4" name="Text 2"/>
+          <p:cNvSpPr/>
+          <p:nvPr/>
+        </p:nvSpPr>
+        <p:spPr>
+          <a:xfrm>
+            <a:off x="406301" y="4434929"/>
+            <a:ext cx="8498026" cy="213271"/>
+          </a:xfrm>
+          <a:prstGeom prst="rect">
+            <a:avLst/>
+          </a:prstGeom>
+          <a:noFill/>
+          <a:ln/>
+        </p:spPr>
+        <p:txBody>
+          <a:bodyPr wrap="square" lIns="0" tIns="0" rIns="0" bIns="0" rtlCol="0" anchor="t"/>
+          <a:lstStyle/>
+          <a:p>
+            <a:pPr algn="l" indent="0" marL="0">
+              <a:lnSpc>
+                <a:spcPts val="1680"/>
+              </a:lnSpc>
+              <a:spcBef>
+                <a:spcPts val="300"/>
+              </a:spcBef>
+              <a:spcAft>
+                <a:spcPts val="300"/>
+              </a:spcAft>
+              <a:buNone/>
+            </a:pPr>
+            <a:r>
+              <a:rPr lang="en-US" sz="1200" dirty="0">
+                <a:solidFill>
+                  <a:srgbClr val="2C2C2C"/>
+                </a:solidFill>
+                <a:latin typeface="Verdana" pitchFamily="34" charset="0"/>
+                <a:ea typeface="Verdana" pitchFamily="34" charset="-122"/>
+                <a:cs typeface="Verdana" pitchFamily="34" charset="-120"/>
+              </a:rPr>
+              <a:t>Primary ·  · IKS Curriculum</a:t>
+            </a:r>
+            <a:endParaRPr lang="en-US" sz="1200" dirty="0"/>
+          </a:p>
+        </p:txBody>
+      </p:sp>
+    </p:spTree>
+  </p:cSld>
+  <p:clrMapOvr>
+    <a:masterClrMapping/>
+  </p:clrMapOvr>
+</p:sld>
+</file>
+
+<file path=ppt/slides/slide11.xml><?xml version="1.0" encoding="utf-8"?>
+<p:sld xmlns:a="http://schemas.openxmlformats.org/drawingml/2006/main" xmlns:r="http://schemas.openxmlformats.org/officeDocument/2006/relationships" xmlns:p="http://schemas.openxmlformats.org/presentationml/2006/main">
+  <p:cSld name="Slide 11">
+    <p:bg>
+      <p:bgPr>
+        <a:solidFill>
+          <a:srgbClr val="FAF7F2"/>
+        </a:solidFill>
+      </p:bgPr>
+    </p:bg>
+    <p:spTree>
+      <p:nvGrpSpPr>
+        <p:cNvPr id="1" name=""/>
+        <p:cNvGrpSpPr/>
+        <p:nvPr/>
+      </p:nvGrpSpPr>
+      <p:grpSpPr>
+        <a:xfrm>
+          <a:off x="0" y="0"/>
+          <a:ext cx="0" cy="0"/>
+          <a:chOff x="0" y="0"/>
+          <a:chExt cx="0" cy="0"/>
+        </a:xfrm>
+      </p:grpSpPr>
+      <p:sp>
+        <p:nvSpPr>
+          <p:cNvPr id="2" name="Text 0"/>
+          <p:cNvSpPr/>
+          <p:nvPr/>
+        </p:nvSpPr>
+        <p:spPr>
+          <a:xfrm>
+            <a:off x="0" y="0"/>
+            <a:ext cx="9144000" cy="101501"/>
+          </a:xfrm>
+          <a:prstGeom prst="rect">
+            <a:avLst/>
+          </a:prstGeom>
+          <a:solidFill>
+            <a:srgbClr val="87A96B"/>
+          </a:solidFill>
+          <a:ln/>
+        </p:spPr>
+        <p:txBody>
+          <a:bodyPr wrap="square" rtlCol="0" anchor="ctr"/>
+          <a:lstStyle/>
+          <a:p>
+            <a:pPr indent="0" marL="0">
+              <a:buNone/>
+            </a:pPr>
+            <a:endParaRPr lang="en-US" dirty="0"/>
+          </a:p>
+        </p:txBody>
+      </p:sp>
+      <p:sp>
+        <p:nvSpPr>
+          <p:cNvPr id="3" name="Text 1"/>
+          <p:cNvSpPr/>
+          <p:nvPr/>
+        </p:nvSpPr>
+        <p:spPr>
+          <a:xfrm>
+            <a:off x="406301" y="457051"/>
+            <a:ext cx="8498026" cy="274290"/>
+          </a:xfrm>
+          <a:prstGeom prst="rect">
+            <a:avLst/>
+          </a:prstGeom>
+          <a:noFill/>
+          <a:ln/>
+        </p:spPr>
+        <p:txBody>
+          <a:bodyPr wrap="square" lIns="0" tIns="0" rIns="0" bIns="0" rtlCol="0" anchor="t"/>
+          <a:lstStyle/>
+          <a:p>
+            <a:pPr algn="l" indent="0" marL="0">
+              <a:lnSpc>
+                <a:spcPts val="2160"/>
+              </a:lnSpc>
+              <a:spcBef>
+                <a:spcPts val="600"/>
+              </a:spcBef>
+              <a:spcAft>
+                <a:spcPts val="800"/>
+              </a:spcAft>
+              <a:buNone/>
+            </a:pPr>
+            <a:r>
+              <a:rPr lang="en-US" sz="1800" b="1" dirty="0">
+                <a:solidFill>
+                  <a:srgbClr val="E07A5F"/>
+                </a:solidFill>
+                <a:latin typeface="Georgia" pitchFamily="34" charset="0"/>
+                <a:ea typeface="Georgia" pitchFamily="34" charset="-122"/>
+                <a:cs typeface="Georgia" pitchFamily="34" charset="-120"/>
+              </a:rPr>
+              <a:t>Homework</a:t>
+            </a:r>
+            <a:endParaRPr lang="en-US" sz="1800" dirty="0"/>
+          </a:p>
+        </p:txBody>
+      </p:sp>
+      <p:sp>
+        <p:nvSpPr>
+          <p:cNvPr id="4" name="Text 2"/>
+          <p:cNvSpPr/>
+          <p:nvPr/>
+        </p:nvSpPr>
+        <p:spPr>
+          <a:xfrm>
+            <a:off x="634901" y="883593"/>
+            <a:ext cx="8102798" cy="281880"/>
+          </a:xfrm>
+          <a:prstGeom prst="rect">
+            <a:avLst/>
+          </a:prstGeom>
+          <a:noFill/>
+          <a:ln/>
+        </p:spPr>
+        <p:txBody>
+          <a:bodyPr wrap="square" lIns="0" tIns="0" rIns="0" bIns="0" rtlCol="0" anchor="t"/>
+          <a:lstStyle/>
+          <a:p>
+            <a:pPr algn="l" marL="342900" indent="-342900">
+              <a:lnSpc>
+                <a:spcPts val="1620"/>
+              </a:lnSpc>
+              <a:spcAft>
+                <a:spcPts val="300"/>
+              </a:spcAft>
+              <a:buSzPct val="100000"/>
+              <a:buChar char="•"/>
+            </a:pPr>
+            <a:r>
+              <a:rPr lang="en-US" sz="1200" dirty="0">
+                <a:solidFill>
+                  <a:srgbClr val="2C2C2C"/>
+                </a:solidFill>
+                <a:latin typeface="Verdana" pitchFamily="34" charset="0"/>
+                <a:ea typeface="Verdana" pitchFamily="34" charset="-122"/>
+                <a:cs typeface="Verdana" pitchFamily="34" charset="-120"/>
+              </a:rPr>
+              <a:t>Notice tonight: when does YOUR Vāta seem loud? (Before sleep? When excited?)</a:t>
+            </a:r>
+            <a:endParaRPr lang="en-US" sz="1200" dirty="0"/>
+          </a:p>
+        </p:txBody>
+      </p:sp>
+      <p:sp>
+        <p:nvSpPr>
+          <p:cNvPr id="5" name="Text 3"/>
+          <p:cNvSpPr/>
+          <p:nvPr/>
+        </p:nvSpPr>
+        <p:spPr>
+          <a:xfrm>
+            <a:off x="406301" y="4434929"/>
+            <a:ext cx="8498026" cy="213271"/>
+          </a:xfrm>
+          <a:prstGeom prst="rect">
+            <a:avLst/>
+          </a:prstGeom>
+          <a:noFill/>
+          <a:ln/>
+        </p:spPr>
+        <p:txBody>
+          <a:bodyPr wrap="square" lIns="0" tIns="0" rIns="0" bIns="0" rtlCol="0" anchor="t"/>
+          <a:lstStyle/>
+          <a:p>
+            <a:pPr algn="l" indent="0" marL="0">
+              <a:lnSpc>
+                <a:spcPts val="1680"/>
+              </a:lnSpc>
+              <a:spcBef>
+                <a:spcPts val="300"/>
+              </a:spcBef>
+              <a:spcAft>
+                <a:spcPts val="300"/>
+              </a:spcAft>
+              <a:buNone/>
+            </a:pPr>
+            <a:r>
+              <a:rPr lang="en-US" sz="1200" dirty="0">
+                <a:solidFill>
+                  <a:srgbClr val="2C2C2C"/>
+                </a:solidFill>
+                <a:latin typeface="Verdana" pitchFamily="34" charset="0"/>
+                <a:ea typeface="Verdana" pitchFamily="34" charset="-122"/>
+                <a:cs typeface="Verdana" pitchFamily="34" charset="-120"/>
+              </a:rPr>
+              <a:t>Primary ·  · IKS Curriculum</a:t>
+            </a:r>
+            <a:endParaRPr lang="en-US" sz="1200" dirty="0"/>
+          </a:p>
+        </p:txBody>
+      </p:sp>
+    </p:spTree>
+  </p:cSld>
+  <p:clrMapOvr>
+    <a:masterClrMapping/>
+  </p:clrMapOvr>
+</p:sld>
+</file>
+
+<file path=ppt/slides/slide12.xml><?xml version="1.0" encoding="utf-8"?>
+<p:sld xmlns:a="http://schemas.openxmlformats.org/drawingml/2006/main" xmlns:r="http://schemas.openxmlformats.org/officeDocument/2006/relationships" xmlns:p="http://schemas.openxmlformats.org/presentationml/2006/main">
+  <p:cSld name="Slide 12">
+    <p:bg>
+      <p:bgPr>
+        <a:solidFill>
+          <a:srgbClr val="FAF7F2"/>
+        </a:solidFill>
+      </p:bgPr>
+    </p:bg>
+    <p:spTree>
+      <p:nvGrpSpPr>
+        <p:cNvPr id="1" name=""/>
+        <p:cNvGrpSpPr/>
+        <p:nvPr/>
+      </p:nvGrpSpPr>
+      <p:grpSpPr>
+        <a:xfrm>
+          <a:off x="0" y="0"/>
+          <a:ext cx="0" cy="0"/>
+          <a:chOff x="0" y="0"/>
+          <a:chExt cx="0" cy="0"/>
+        </a:xfrm>
+      </p:grpSpPr>
+      <p:sp>
+        <p:nvSpPr>
+          <p:cNvPr id="2" name="Text 0"/>
+          <p:cNvSpPr/>
+          <p:nvPr/>
+        </p:nvSpPr>
+        <p:spPr>
+          <a:xfrm>
+            <a:off x="0" y="0"/>
+            <a:ext cx="9144000" cy="101501"/>
+          </a:xfrm>
+          <a:prstGeom prst="rect">
+            <a:avLst/>
+          </a:prstGeom>
+          <a:solidFill>
+            <a:srgbClr val="87A96B"/>
+          </a:solidFill>
+          <a:ln/>
+        </p:spPr>
+        <p:txBody>
+          <a:bodyPr wrap="square" rtlCol="0" anchor="ctr"/>
+          <a:lstStyle/>
+          <a:p>
+            <a:pPr indent="0" marL="0">
+              <a:buNone/>
+            </a:pPr>
+            <a:endParaRPr lang="en-US" dirty="0"/>
+          </a:p>
+        </p:txBody>
+      </p:sp>
+      <p:sp>
+        <p:nvSpPr>
+          <p:cNvPr id="3" name="Text 1"/>
+          <p:cNvSpPr/>
+          <p:nvPr/>
+        </p:nvSpPr>
+        <p:spPr>
+          <a:xfrm>
+            <a:off x="406301" y="457051"/>
+            <a:ext cx="8498026" cy="274290"/>
+          </a:xfrm>
+          <a:prstGeom prst="rect">
+            <a:avLst/>
+          </a:prstGeom>
+          <a:noFill/>
+          <a:ln/>
+        </p:spPr>
+        <p:txBody>
+          <a:bodyPr wrap="square" lIns="0" tIns="0" rIns="0" bIns="0" rtlCol="0" anchor="t"/>
+          <a:lstStyle/>
+          <a:p>
+            <a:pPr algn="l" indent="0" marL="0">
+              <a:lnSpc>
+                <a:spcPts val="2160"/>
+              </a:lnSpc>
+              <a:spcBef>
+                <a:spcPts val="600"/>
+              </a:spcBef>
+              <a:spcAft>
+                <a:spcPts val="800"/>
+              </a:spcAft>
+              <a:buNone/>
+            </a:pPr>
+            <a:r>
+              <a:rPr lang="en-US" sz="1800" b="1" dirty="0">
+                <a:solidFill>
+                  <a:srgbClr val="E07A5F"/>
+                </a:solidFill>
+                <a:latin typeface="Georgia" pitchFamily="34" charset="0"/>
+                <a:ea typeface="Georgia" pitchFamily="34" charset="-122"/>
+                <a:cs typeface="Georgia" pitchFamily="34" charset="-120"/>
+              </a:rPr>
               <a:t>Differentiation</a:t>
             </a:r>
             <a:endParaRPr lang="en-US" sz="1800" dirty="0"/>
@@ -2384,7 +2828,7 @@
                 <a:ea typeface="Georgia" pitchFamily="34" charset="-122"/>
                 <a:cs typeface="Georgia" pitchFamily="34" charset="-120"/>
               </a:rPr>
-              <a:t>Materials</a:t>
+              <a:t>Goal</a:t>
             </a:r>
             <a:endParaRPr lang="en-US" sz="1800" dirty="0"/>
           </a:p>
@@ -2432,7 +2876,7 @@
                 <a:ea typeface="Verdana" pitchFamily="34" charset="-122"/>
                 <a:cs typeface="Verdana" pitchFamily="34" charset="-120"/>
               </a:rPr>
-              <a:t>– Open space – Drawing paper</a:t>
+              <a:t>Children explore Vāta through movement and a game.</a:t>
             </a:r>
             <a:endParaRPr lang="en-US" sz="1200" dirty="0"/>
           </a:p>
@@ -2590,7 +3034,7 @@
                 <a:ea typeface="Georgia" pitchFamily="34" charset="-122"/>
                 <a:cs typeface="Georgia" pitchFamily="34" charset="-120"/>
               </a:rPr>
-              <a:t>Flow</a:t>
+              <a:t>Materials</a:t>
             </a:r>
             <a:endParaRPr lang="en-US" sz="1800" dirty="0"/>
           </a:p>
@@ -2599,6 +3043,76 @@
       <p:sp>
         <p:nvSpPr>
           <p:cNvPr id="4" name="Text 2"/>
+          <p:cNvSpPr/>
+          <p:nvPr/>
+        </p:nvSpPr>
+        <p:spPr>
+          <a:xfrm>
+            <a:off x="634901" y="883593"/>
+            <a:ext cx="8102798" cy="525661"/>
+          </a:xfrm>
+          <a:prstGeom prst="rect">
+            <a:avLst/>
+          </a:prstGeom>
+          <a:noFill/>
+          <a:ln/>
+        </p:spPr>
+        <p:txBody>
+          <a:bodyPr wrap="square" lIns="0" tIns="0" rIns="0" bIns="0" rtlCol="0" anchor="t"/>
+          <a:lstStyle/>
+          <a:p>
+            <a:pPr algn="l" marL="342900" indent="-342900">
+              <a:lnSpc>
+                <a:spcPts val="1620"/>
+              </a:lnSpc>
+              <a:spcAft>
+                <a:spcPts val="300"/>
+              </a:spcAft>
+              <a:buSzPct val="100000"/>
+              <a:buChar char="•"/>
+            </a:pPr>
+            <a:r>
+              <a:rPr lang="en-US" sz="1200" dirty="0">
+                <a:solidFill>
+                  <a:srgbClr val="2C2C2C"/>
+                </a:solidFill>
+                <a:latin typeface="Verdana" pitchFamily="34" charset="0"/>
+                <a:ea typeface="Verdana" pitchFamily="34" charset="-122"/>
+                <a:cs typeface="Verdana" pitchFamily="34" charset="-120"/>
+              </a:rPr>
+              <a:t>Open space</a:t>
+            </a:r>
+            <a:endParaRPr lang="en-US" sz="1200" dirty="0"/>
+          </a:p>
+          <a:p>
+            <a:pPr algn="l" marL="342900" indent="-342900">
+              <a:lnSpc>
+                <a:spcPts val="1620"/>
+              </a:lnSpc>
+              <a:spcAft>
+                <a:spcPts val="300"/>
+              </a:spcAft>
+              <a:buSzPct val="100000"/>
+              <a:buChar char="•"/>
+            </a:pPr>
+            <a:r>
+              <a:rPr lang="en-US" sz="1200" dirty="0">
+                <a:solidFill>
+                  <a:srgbClr val="2C2C2C"/>
+                </a:solidFill>
+                <a:latin typeface="Verdana" pitchFamily="34" charset="0"/>
+                <a:ea typeface="Verdana" pitchFamily="34" charset="-122"/>
+                <a:cs typeface="Verdana" pitchFamily="34" charset="-120"/>
+              </a:rPr>
+              <a:t>Drawing paper</a:t>
+            </a:r>
+            <a:endParaRPr lang="en-US" sz="1200" dirty="0"/>
+          </a:p>
+        </p:txBody>
+      </p:sp>
+      <p:sp>
+        <p:nvSpPr>
+          <p:cNvPr id="5" name="Text 3"/>
           <p:cNvSpPr/>
           <p:nvPr/>
         </p:nvSpPr>
@@ -2748,7 +3262,7 @@
                 <a:ea typeface="Georgia" pitchFamily="34" charset="-122"/>
                 <a:cs typeface="Georgia" pitchFamily="34" charset="-120"/>
               </a:rPr>
-              <a:t>Settle + chant (3 min)</a:t>
+              <a:t>Flow</a:t>
             </a:r>
             <a:endParaRPr lang="en-US" sz="1800" dirty="0"/>
           </a:p>
@@ -2906,7 +3420,7 @@
                 <a:ea typeface="Georgia" pitchFamily="34" charset="-122"/>
                 <a:cs typeface="Georgia" pitchFamily="34" charset="-120"/>
               </a:rPr>
-              <a:t>Story (5 min)</a:t>
+              <a:t>Settle + chant (3 min)</a:t>
             </a:r>
             <a:endParaRPr lang="en-US" sz="1800" dirty="0"/>
           </a:p>
@@ -2915,125 +3429,6 @@
       <p:sp>
         <p:nvSpPr>
           <p:cNvPr id="4" name="Text 2"/>
-          <p:cNvSpPr/>
-          <p:nvPr/>
-        </p:nvSpPr>
-        <p:spPr>
-          <a:xfrm>
-            <a:off x="406301" y="870942"/>
-            <a:ext cx="8498026" cy="213271"/>
-          </a:xfrm>
-          <a:prstGeom prst="rect">
-            <a:avLst/>
-          </a:prstGeom>
-          <a:noFill/>
-          <a:ln/>
-        </p:spPr>
-        <p:txBody>
-          <a:bodyPr wrap="square" lIns="0" tIns="0" rIns="0" bIns="0" rtlCol="0" anchor="t"/>
-          <a:lstStyle/>
-          <a:p>
-            <a:pPr algn="l" indent="0" marL="0">
-              <a:lnSpc>
-                <a:spcPts val="1680"/>
-              </a:lnSpc>
-              <a:spcBef>
-                <a:spcPts val="300"/>
-              </a:spcBef>
-              <a:spcAft>
-                <a:spcPts val="300"/>
-              </a:spcAft>
-              <a:buNone/>
-            </a:pPr>
-            <a:r>
-              <a:rPr lang="en-US" sz="1200" i="1" dirty="0">
-                <a:solidFill>
-                  <a:srgbClr val="2C2C2C"/>
-                </a:solidFill>
-                <a:latin typeface="Verdana" pitchFamily="34" charset="0"/>
-                <a:ea typeface="Verdana" pitchFamily="34" charset="-122"/>
-                <a:cs typeface="Verdana" pitchFamily="34" charset="-120"/>
-              </a:rPr>
-              <a:t>"Today: meet Vāta — the WIND friend. Vāta makes things MOVE in your body."</a:t>
-            </a:r>
-            <a:endParaRPr lang="en-US" sz="1200" dirty="0"/>
-          </a:p>
-        </p:txBody>
-      </p:sp>
-      <p:sp>
-        <p:nvSpPr>
-          <p:cNvPr id="5" name="Text 3"/>
-          <p:cNvSpPr/>
-          <p:nvPr/>
-        </p:nvSpPr>
-        <p:spPr>
-          <a:xfrm>
-            <a:off x="406301" y="1160413"/>
-            <a:ext cx="8498026" cy="426541"/>
-          </a:xfrm>
-          <a:prstGeom prst="rect">
-            <a:avLst/>
-          </a:prstGeom>
-          <a:noFill/>
-          <a:ln/>
-        </p:spPr>
-        <p:txBody>
-          <a:bodyPr wrap="square" lIns="0" tIns="0" rIns="0" bIns="0" rtlCol="0" anchor="t"/>
-          <a:lstStyle/>
-          <a:p>
-            <a:pPr algn="l" indent="0" marL="0">
-              <a:lnSpc>
-                <a:spcPts val="1680"/>
-              </a:lnSpc>
-              <a:spcBef>
-                <a:spcPts val="300"/>
-              </a:spcBef>
-              <a:spcAft>
-                <a:spcPts val="300"/>
-              </a:spcAft>
-              <a:buNone/>
-            </a:pPr>
-            <a:r>
-              <a:rPr lang="en-US" sz="1200" i="1" dirty="0">
-                <a:solidFill>
-                  <a:srgbClr val="2C2C2C"/>
-                </a:solidFill>
-                <a:latin typeface="Verdana" pitchFamily="34" charset="0"/>
-                <a:ea typeface="Verdana" pitchFamily="34" charset="-122"/>
-                <a:cs typeface="Verdana" pitchFamily="34" charset="-120"/>
-              </a:rPr>
-              <a:t>"What does Vāta do?"</a:t>
-            </a:r>
-            <a:pPr algn="l" indent="0" marL="0">
-              <a:lnSpc>
-                <a:spcPts val="1680"/>
-              </a:lnSpc>
-              <a:spcBef>
-                <a:spcPts val="300"/>
-              </a:spcBef>
-              <a:spcAft>
-                <a:spcPts val="300"/>
-              </a:spcAft>
-              <a:buNone/>
-            </a:pPr>
-            <a:r>
-              <a:rPr lang="en-US" sz="1200" dirty="0">
-                <a:solidFill>
-                  <a:srgbClr val="2C2C2C"/>
-                </a:solidFill>
-                <a:latin typeface="Verdana" pitchFamily="34" charset="0"/>
-                <a:ea typeface="Verdana" pitchFamily="34" charset="-122"/>
-                <a:cs typeface="Verdana" pitchFamily="34" charset="-120"/>
-              </a:rPr>
-              <a:t> – Your breath in and out — Vāta. – Your heart beating — Vāta. – Your hand waving — Vāta. – Your thoughts moving — Vāta.</a:t>
-            </a:r>
-            <a:endParaRPr lang="en-US" sz="1200" dirty="0"/>
-          </a:p>
-        </p:txBody>
-      </p:sp>
-      <p:sp>
-        <p:nvSpPr>
-          <p:cNvPr id="6" name="Text 4"/>
           <p:cNvSpPr/>
           <p:nvPr/>
         </p:nvSpPr>
@@ -3183,7 +3578,7 @@
                 <a:ea typeface="Georgia" pitchFamily="34" charset="-122"/>
                 <a:cs typeface="Georgia" pitchFamily="34" charset="-120"/>
               </a:rPr>
-              <a:t>Vāta game (15 min)</a:t>
+              <a:t>Story (5 min)</a:t>
             </a:r>
             <a:endParaRPr lang="en-US" sz="1800" dirty="0"/>
           </a:p>
@@ -3223,7 +3618,7 @@
               <a:buNone/>
             </a:pPr>
             <a:r>
-              <a:rPr lang="en-US" sz="1200" b="1" dirty="0">
+              <a:rPr lang="en-US" sz="1200" i="1" dirty="0">
                 <a:solidFill>
                   <a:srgbClr val="2C2C2C"/>
                 </a:solidFill>
@@ -3231,8 +3626,33 @@
                 <a:ea typeface="Verdana" pitchFamily="34" charset="-122"/>
                 <a:cs typeface="Verdana" pitchFamily="34" charset="-120"/>
               </a:rPr>
-              <a:t>Movement game.</a:t>
-            </a:r>
+              <a:t>"Today: meet Vāta — the WIND friend. Vāta makes things MOVE in your body."</a:t>
+            </a:r>
+            <a:endParaRPr lang="en-US" sz="1200" dirty="0"/>
+          </a:p>
+        </p:txBody>
+      </p:sp>
+      <p:sp>
+        <p:nvSpPr>
+          <p:cNvPr id="5" name="Text 3"/>
+          <p:cNvSpPr/>
+          <p:nvPr/>
+        </p:nvSpPr>
+        <p:spPr>
+          <a:xfrm>
+            <a:off x="406301" y="1160413"/>
+            <a:ext cx="8498026" cy="213271"/>
+          </a:xfrm>
+          <a:prstGeom prst="rect">
+            <a:avLst/>
+          </a:prstGeom>
+          <a:noFill/>
+          <a:ln/>
+        </p:spPr>
+        <p:txBody>
+          <a:bodyPr wrap="square" lIns="0" tIns="0" rIns="0" bIns="0" rtlCol="0" anchor="t"/>
+          <a:lstStyle/>
+          <a:p>
             <a:pPr algn="l" indent="0" marL="0">
               <a:lnSpc>
                 <a:spcPts val="1680"/>
@@ -3246,7 +3666,7 @@
               <a:buNone/>
             </a:pPr>
             <a:r>
-              <a:rPr lang="en-US" sz="1200" dirty="0">
+              <a:rPr lang="en-US" sz="1200" i="1" dirty="0">
                 <a:solidFill>
                   <a:srgbClr val="2C2C2C"/>
                 </a:solidFill>
@@ -3254,7 +3674,7 @@
                 <a:ea typeface="Verdana" pitchFamily="34" charset="-122"/>
                 <a:cs typeface="Verdana" pitchFamily="34" charset="-120"/>
               </a:rPr>
-              <a:t> Three rounds:</a:t>
+              <a:t>"What does Vāta do?"</a:t>
             </a:r>
             <a:endParaRPr lang="en-US" sz="1200" dirty="0"/>
           </a:p>
@@ -3262,14 +3682,14 @@
       </p:sp>
       <p:sp>
         <p:nvSpPr>
-          <p:cNvPr id="5" name="Text 3"/>
+          <p:cNvPr id="6" name="Text 4"/>
           <p:cNvSpPr/>
           <p:nvPr/>
         </p:nvSpPr>
         <p:spPr>
           <a:xfrm>
-            <a:off x="634901" y="1173063"/>
-            <a:ext cx="8102798" cy="769441"/>
+            <a:off x="634901" y="1462534"/>
+            <a:ext cx="8102798" cy="1013222"/>
           </a:xfrm>
           <a:prstGeom prst="rect">
             <a:avLst/>
@@ -3292,7 +3712,7 @@
               <a:buChar char="•"/>
             </a:pPr>
             <a:r>
-              <a:rPr lang="en-US" sz="1200" i="1" dirty="0">
+              <a:rPr lang="en-US" sz="1200" dirty="0">
                 <a:solidFill>
                   <a:srgbClr val="2C2C2C"/>
                 </a:solidFill>
@@ -3300,16 +3720,20 @@
                 <a:ea typeface="Verdana" pitchFamily="34" charset="-122"/>
                 <a:cs typeface="Verdana" pitchFamily="34" charset="-120"/>
               </a:rPr>
-              <a:t>Wind round:</a:t>
-            </a:r>
-            <a:pPr algn="l" indent="0" marL="0">
+              <a:t>Your breath in and out — Vāta.</a:t>
+            </a:r>
+            <a:endParaRPr lang="en-US" sz="1200" dirty="0"/>
+          </a:p>
+          <a:p>
+            <a:pPr algn="l" marL="342900" indent="-342900">
               <a:lnSpc>
                 <a:spcPts val="1620"/>
               </a:lnSpc>
               <a:spcAft>
                 <a:spcPts val="300"/>
               </a:spcAft>
-              <a:buNone/>
+              <a:buSzPct val="100000"/>
+              <a:buChar char="•"/>
             </a:pPr>
             <a:r>
               <a:rPr lang="en-US" sz="1200" dirty="0">
@@ -3320,7 +3744,7 @@
                 <a:ea typeface="Verdana" pitchFamily="34" charset="-122"/>
                 <a:cs typeface="Verdana" pitchFamily="34" charset="-120"/>
               </a:rPr>
-              <a:t> run around the room like the wind for 30 seconds.</a:t>
+              <a:t>Your heart beating — Vāta.</a:t>
             </a:r>
             <a:endParaRPr lang="en-US" sz="1200" dirty="0"/>
           </a:p>
@@ -3336,7 +3760,7 @@
               <a:buChar char="•"/>
             </a:pPr>
             <a:r>
-              <a:rPr lang="en-US" sz="1200" i="1" dirty="0">
+              <a:rPr lang="en-US" sz="1200" dirty="0">
                 <a:solidFill>
                   <a:srgbClr val="2C2C2C"/>
                 </a:solidFill>
@@ -3344,16 +3768,20 @@
                 <a:ea typeface="Verdana" pitchFamily="34" charset="-122"/>
                 <a:cs typeface="Verdana" pitchFamily="34" charset="-120"/>
               </a:rPr>
-              <a:t>Quick-turn round:</a:t>
-            </a:r>
-            <a:pPr algn="l" indent="0" marL="0">
+              <a:t>Your hand waving — Vāta.</a:t>
+            </a:r>
+            <a:endParaRPr lang="en-US" sz="1200" dirty="0"/>
+          </a:p>
+          <a:p>
+            <a:pPr algn="l" marL="342900" indent="-342900">
               <a:lnSpc>
                 <a:spcPts val="1620"/>
               </a:lnSpc>
               <a:spcAft>
                 <a:spcPts val="300"/>
               </a:spcAft>
-              <a:buNone/>
+              <a:buSzPct val="100000"/>
+              <a:buChar char="•"/>
             </a:pPr>
             <a:r>
               <a:rPr lang="en-US" sz="1200" dirty="0">
@@ -3364,178 +3792,15 @@
                 <a:ea typeface="Verdana" pitchFamily="34" charset="-122"/>
                 <a:cs typeface="Verdana" pitchFamily="34" charset="-120"/>
               </a:rPr>
-              <a:t> stop and change direction every 5 seconds.</a:t>
+              <a:t>Your thoughts moving — Vāta.</a:t>
             </a:r>
             <a:endParaRPr lang="en-US" sz="1200" dirty="0"/>
           </a:p>
-          <a:p>
-            <a:pPr algn="l" marL="342900" indent="-342900">
-              <a:lnSpc>
-                <a:spcPts val="1620"/>
-              </a:lnSpc>
-              <a:spcAft>
-                <a:spcPts val="300"/>
-              </a:spcAft>
-              <a:buSzPct val="100000"/>
-              <a:buChar char="•"/>
-            </a:pPr>
-            <a:r>
-              <a:rPr lang="en-US" sz="1200" i="1" dirty="0">
-                <a:solidFill>
-                  <a:srgbClr val="2C2C2C"/>
-                </a:solidFill>
-                <a:latin typeface="Verdana" pitchFamily="34" charset="0"/>
-                <a:ea typeface="Verdana" pitchFamily="34" charset="-122"/>
-                <a:cs typeface="Verdana" pitchFamily="34" charset="-120"/>
-              </a:rPr>
-              <a:t>Breath round:</a:t>
-            </a:r>
-            <a:pPr algn="l" indent="0" marL="0">
-              <a:lnSpc>
-                <a:spcPts val="1620"/>
-              </a:lnSpc>
-              <a:spcAft>
-                <a:spcPts val="300"/>
-              </a:spcAft>
-              <a:buNone/>
-            </a:pPr>
-            <a:r>
-              <a:rPr lang="en-US" sz="1200" dirty="0">
-                <a:solidFill>
-                  <a:srgbClr val="2C2C2C"/>
-                </a:solidFill>
-                <a:latin typeface="Verdana" pitchFamily="34" charset="0"/>
-                <a:ea typeface="Verdana" pitchFamily="34" charset="-122"/>
-                <a:cs typeface="Verdana" pitchFamily="34" charset="-120"/>
-              </a:rPr>
-              <a:t> sit. Breathe FAST 10 times. (How does your body feel? Vāta is awake.)</a:t>
-            </a:r>
-            <a:endParaRPr lang="en-US" sz="1200" dirty="0"/>
-          </a:p>
-        </p:txBody>
-      </p:sp>
-      <p:sp>
-        <p:nvSpPr>
-          <p:cNvPr id="6" name="Text 4"/>
-          <p:cNvSpPr/>
-          <p:nvPr/>
-        </p:nvSpPr>
-        <p:spPr>
-          <a:xfrm>
-            <a:off x="406301" y="2031355"/>
-            <a:ext cx="8498026" cy="426541"/>
-          </a:xfrm>
-          <a:prstGeom prst="rect">
-            <a:avLst/>
-          </a:prstGeom>
-          <a:noFill/>
-          <a:ln/>
-        </p:spPr>
-        <p:txBody>
-          <a:bodyPr wrap="square" lIns="0" tIns="0" rIns="0" bIns="0" rtlCol="0" anchor="t"/>
-          <a:lstStyle/>
-          <a:p>
-            <a:pPr algn="l" indent="0" marL="0">
-              <a:lnSpc>
-                <a:spcPts val="1680"/>
-              </a:lnSpc>
-              <a:spcBef>
-                <a:spcPts val="300"/>
-              </a:spcBef>
-              <a:spcAft>
-                <a:spcPts val="300"/>
-              </a:spcAft>
-              <a:buNone/>
-            </a:pPr>
-            <a:r>
-              <a:rPr lang="en-US" sz="1200" dirty="0">
-                <a:solidFill>
-                  <a:srgbClr val="2C2C2C"/>
-                </a:solidFill>
-                <a:latin typeface="Verdana" pitchFamily="34" charset="0"/>
-                <a:ea typeface="Verdana" pitchFamily="34" charset="-122"/>
-                <a:cs typeface="Verdana" pitchFamily="34" charset="-120"/>
-              </a:rPr>
-              <a:t>Then settle. </a:t>
-            </a:r>
-            <a:pPr algn="l" indent="0" marL="0">
-              <a:lnSpc>
-                <a:spcPts val="1680"/>
-              </a:lnSpc>
-              <a:spcBef>
-                <a:spcPts val="300"/>
-              </a:spcBef>
-              <a:spcAft>
-                <a:spcPts val="300"/>
-              </a:spcAft>
-              <a:buNone/>
-            </a:pPr>
-            <a:r>
-              <a:rPr lang="en-US" sz="1200" i="1" dirty="0">
-                <a:solidFill>
-                  <a:srgbClr val="2C2C2C"/>
-                </a:solidFill>
-                <a:latin typeface="Verdana" pitchFamily="34" charset="0"/>
-                <a:ea typeface="Verdana" pitchFamily="34" charset="-122"/>
-                <a:cs typeface="Verdana" pitchFamily="34" charset="-120"/>
-              </a:rPr>
-              <a:t>"That was your Vāta friend being LOUD. When Vāta is loud, we feel quick, talkative, sometimes worried."</a:t>
-            </a:r>
-            <a:endParaRPr lang="en-US" sz="1200" dirty="0"/>
-          </a:p>
         </p:txBody>
       </p:sp>
       <p:sp>
         <p:nvSpPr>
           <p:cNvPr id="7" name="Text 5"/>
-          <p:cNvSpPr/>
-          <p:nvPr/>
-        </p:nvSpPr>
-        <p:spPr>
-          <a:xfrm>
-            <a:off x="406301" y="2534096"/>
-            <a:ext cx="8498026" cy="213271"/>
-          </a:xfrm>
-          <a:prstGeom prst="rect">
-            <a:avLst/>
-          </a:prstGeom>
-          <a:noFill/>
-          <a:ln/>
-        </p:spPr>
-        <p:txBody>
-          <a:bodyPr wrap="square" lIns="0" tIns="0" rIns="0" bIns="0" rtlCol="0" anchor="t"/>
-          <a:lstStyle/>
-          <a:p>
-            <a:pPr algn="l" indent="0" marL="0">
-              <a:lnSpc>
-                <a:spcPts val="1680"/>
-              </a:lnSpc>
-              <a:spcBef>
-                <a:spcPts val="300"/>
-              </a:spcBef>
-              <a:spcAft>
-                <a:spcPts val="300"/>
-              </a:spcAft>
-              <a:buNone/>
-            </a:pPr>
-            <a:r>
-              <a:rPr lang="en-US" sz="1200" i="1" dirty="0">
-                <a:solidFill>
-                  <a:srgbClr val="2C2C2C"/>
-                </a:solidFill>
-                <a:latin typeface="Verdana" pitchFamily="34" charset="0"/>
-                <a:ea typeface="Verdana" pitchFamily="34" charset="-122"/>
-                <a:cs typeface="Verdana" pitchFamily="34" charset="-120"/>
-              </a:rPr>
-              <a:t>"To calm Vāta: SLOW breath. Warm food. Sit still. Hug something soft."</a:t>
-            </a:r>
-            <a:endParaRPr lang="en-US" sz="1200" dirty="0"/>
-          </a:p>
-        </p:txBody>
-      </p:sp>
-      <p:sp>
-        <p:nvSpPr>
-          <p:cNvPr id="8" name="Text 6"/>
           <p:cNvSpPr/>
           <p:nvPr/>
         </p:nvSpPr>
@@ -3685,7 +3950,7 @@
                 <a:ea typeface="Georgia" pitchFamily="34" charset="-122"/>
                 <a:cs typeface="Georgia" pitchFamily="34" charset="-120"/>
               </a:rPr>
-              <a:t>Drawing (5 min)</a:t>
+              <a:t>Vāta game (15 min)</a:t>
             </a:r>
             <a:endParaRPr lang="en-US" sz="1800" dirty="0"/>
           </a:p>
@@ -3725,7 +3990,7 @@
               <a:buNone/>
             </a:pPr>
             <a:r>
-              <a:rPr lang="en-US" sz="1200" dirty="0">
+              <a:rPr lang="en-US" sz="1200" b="1" dirty="0">
                 <a:solidFill>
                   <a:srgbClr val="2C2C2C"/>
                 </a:solidFill>
@@ -3733,7 +3998,30 @@
                 <a:ea typeface="Verdana" pitchFamily="34" charset="-122"/>
                 <a:cs typeface="Verdana" pitchFamily="34" charset="-120"/>
               </a:rPr>
-              <a:t>Draw your Vāta friend doing something quick.</a:t>
+              <a:t>Movement game.</a:t>
+            </a:r>
+            <a:pPr algn="l" indent="0" marL="0">
+              <a:lnSpc>
+                <a:spcPts val="1680"/>
+              </a:lnSpc>
+              <a:spcBef>
+                <a:spcPts val="300"/>
+              </a:spcBef>
+              <a:spcAft>
+                <a:spcPts val="300"/>
+              </a:spcAft>
+              <a:buNone/>
+            </a:pPr>
+            <a:r>
+              <a:rPr lang="en-US" sz="1200" dirty="0">
+                <a:solidFill>
+                  <a:srgbClr val="2C2C2C"/>
+                </a:solidFill>
+                <a:latin typeface="Verdana" pitchFamily="34" charset="0"/>
+                <a:ea typeface="Verdana" pitchFamily="34" charset="-122"/>
+                <a:cs typeface="Verdana" pitchFamily="34" charset="-120"/>
+              </a:rPr>
+              <a:t> Three rounds:</a:t>
             </a:r>
             <a:endParaRPr lang="en-US" sz="1200" dirty="0"/>
           </a:p>
@@ -3742,6 +4030,231 @@
       <p:sp>
         <p:nvSpPr>
           <p:cNvPr id="5" name="Text 3"/>
+          <p:cNvSpPr/>
+          <p:nvPr/>
+        </p:nvSpPr>
+        <p:spPr>
+          <a:xfrm>
+            <a:off x="634901" y="1173063"/>
+            <a:ext cx="8102798" cy="769441"/>
+          </a:xfrm>
+          <a:prstGeom prst="rect">
+            <a:avLst/>
+          </a:prstGeom>
+          <a:noFill/>
+          <a:ln/>
+        </p:spPr>
+        <p:txBody>
+          <a:bodyPr wrap="square" lIns="0" tIns="0" rIns="0" bIns="0" rtlCol="0" anchor="t"/>
+          <a:lstStyle/>
+          <a:p>
+            <a:pPr algn="l" marL="342900" indent="-342900">
+              <a:lnSpc>
+                <a:spcPts val="1620"/>
+              </a:lnSpc>
+              <a:spcAft>
+                <a:spcPts val="300"/>
+              </a:spcAft>
+              <a:buSzPct val="100000"/>
+              <a:buChar char="•"/>
+            </a:pPr>
+            <a:r>
+              <a:rPr lang="en-US" sz="1200" i="1" dirty="0">
+                <a:solidFill>
+                  <a:srgbClr val="2C2C2C"/>
+                </a:solidFill>
+                <a:latin typeface="Verdana" pitchFamily="34" charset="0"/>
+                <a:ea typeface="Verdana" pitchFamily="34" charset="-122"/>
+                <a:cs typeface="Verdana" pitchFamily="34" charset="-120"/>
+              </a:rPr>
+              <a:t>Wind round:</a:t>
+            </a:r>
+            <a:pPr algn="l" indent="0" marL="0">
+              <a:lnSpc>
+                <a:spcPts val="1620"/>
+              </a:lnSpc>
+              <a:spcAft>
+                <a:spcPts val="300"/>
+              </a:spcAft>
+              <a:buNone/>
+            </a:pPr>
+            <a:r>
+              <a:rPr lang="en-US" sz="1200" dirty="0">
+                <a:solidFill>
+                  <a:srgbClr val="2C2C2C"/>
+                </a:solidFill>
+                <a:latin typeface="Verdana" pitchFamily="34" charset="0"/>
+                <a:ea typeface="Verdana" pitchFamily="34" charset="-122"/>
+                <a:cs typeface="Verdana" pitchFamily="34" charset="-120"/>
+              </a:rPr>
+              <a:t> run around the room like the wind for 30 seconds.</a:t>
+            </a:r>
+            <a:endParaRPr lang="en-US" sz="1200" dirty="0"/>
+          </a:p>
+          <a:p>
+            <a:pPr algn="l" marL="342900" indent="-342900">
+              <a:lnSpc>
+                <a:spcPts val="1620"/>
+              </a:lnSpc>
+              <a:spcAft>
+                <a:spcPts val="300"/>
+              </a:spcAft>
+              <a:buSzPct val="100000"/>
+              <a:buChar char="•"/>
+            </a:pPr>
+            <a:r>
+              <a:rPr lang="en-US" sz="1200" i="1" dirty="0">
+                <a:solidFill>
+                  <a:srgbClr val="2C2C2C"/>
+                </a:solidFill>
+                <a:latin typeface="Verdana" pitchFamily="34" charset="0"/>
+                <a:ea typeface="Verdana" pitchFamily="34" charset="-122"/>
+                <a:cs typeface="Verdana" pitchFamily="34" charset="-120"/>
+              </a:rPr>
+              <a:t>Quick-turn round:</a:t>
+            </a:r>
+            <a:pPr algn="l" indent="0" marL="0">
+              <a:lnSpc>
+                <a:spcPts val="1620"/>
+              </a:lnSpc>
+              <a:spcAft>
+                <a:spcPts val="300"/>
+              </a:spcAft>
+              <a:buNone/>
+            </a:pPr>
+            <a:r>
+              <a:rPr lang="en-US" sz="1200" dirty="0">
+                <a:solidFill>
+                  <a:srgbClr val="2C2C2C"/>
+                </a:solidFill>
+                <a:latin typeface="Verdana" pitchFamily="34" charset="0"/>
+                <a:ea typeface="Verdana" pitchFamily="34" charset="-122"/>
+                <a:cs typeface="Verdana" pitchFamily="34" charset="-120"/>
+              </a:rPr>
+              <a:t> stop and change direction every 5 seconds.</a:t>
+            </a:r>
+            <a:endParaRPr lang="en-US" sz="1200" dirty="0"/>
+          </a:p>
+          <a:p>
+            <a:pPr algn="l" marL="342900" indent="-342900">
+              <a:lnSpc>
+                <a:spcPts val="1620"/>
+              </a:lnSpc>
+              <a:spcAft>
+                <a:spcPts val="300"/>
+              </a:spcAft>
+              <a:buSzPct val="100000"/>
+              <a:buChar char="•"/>
+            </a:pPr>
+            <a:r>
+              <a:rPr lang="en-US" sz="1200" i="1" dirty="0">
+                <a:solidFill>
+                  <a:srgbClr val="2C2C2C"/>
+                </a:solidFill>
+                <a:latin typeface="Verdana" pitchFamily="34" charset="0"/>
+                <a:ea typeface="Verdana" pitchFamily="34" charset="-122"/>
+                <a:cs typeface="Verdana" pitchFamily="34" charset="-120"/>
+              </a:rPr>
+              <a:t>Breath round:</a:t>
+            </a:r>
+            <a:pPr algn="l" indent="0" marL="0">
+              <a:lnSpc>
+                <a:spcPts val="1620"/>
+              </a:lnSpc>
+              <a:spcAft>
+                <a:spcPts val="300"/>
+              </a:spcAft>
+              <a:buNone/>
+            </a:pPr>
+            <a:r>
+              <a:rPr lang="en-US" sz="1200" dirty="0">
+                <a:solidFill>
+                  <a:srgbClr val="2C2C2C"/>
+                </a:solidFill>
+                <a:latin typeface="Verdana" pitchFamily="34" charset="0"/>
+                <a:ea typeface="Verdana" pitchFamily="34" charset="-122"/>
+                <a:cs typeface="Verdana" pitchFamily="34" charset="-120"/>
+              </a:rPr>
+              <a:t> sit. Breathe FAST 10 times. (How does your body feel? Vāta is awake.)</a:t>
+            </a:r>
+            <a:endParaRPr lang="en-US" sz="1200" dirty="0"/>
+          </a:p>
+        </p:txBody>
+      </p:sp>
+      <p:sp>
+        <p:nvSpPr>
+          <p:cNvPr id="6" name="Text 4"/>
+          <p:cNvSpPr/>
+          <p:nvPr/>
+        </p:nvSpPr>
+        <p:spPr>
+          <a:xfrm>
+            <a:off x="406301" y="2031355"/>
+            <a:ext cx="8498026" cy="426541"/>
+          </a:xfrm>
+          <a:prstGeom prst="rect">
+            <a:avLst/>
+          </a:prstGeom>
+          <a:noFill/>
+          <a:ln/>
+        </p:spPr>
+        <p:txBody>
+          <a:bodyPr wrap="square" lIns="0" tIns="0" rIns="0" bIns="0" rtlCol="0" anchor="t"/>
+          <a:lstStyle/>
+          <a:p>
+            <a:pPr algn="l" indent="0" marL="0">
+              <a:lnSpc>
+                <a:spcPts val="1680"/>
+              </a:lnSpc>
+              <a:spcBef>
+                <a:spcPts val="300"/>
+              </a:spcBef>
+              <a:spcAft>
+                <a:spcPts val="300"/>
+              </a:spcAft>
+              <a:buNone/>
+            </a:pPr>
+            <a:r>
+              <a:rPr lang="en-US" sz="1200" dirty="0">
+                <a:solidFill>
+                  <a:srgbClr val="2C2C2C"/>
+                </a:solidFill>
+                <a:latin typeface="Verdana" pitchFamily="34" charset="0"/>
+                <a:ea typeface="Verdana" pitchFamily="34" charset="-122"/>
+                <a:cs typeface="Verdana" pitchFamily="34" charset="-120"/>
+              </a:rPr>
+              <a:t>Then settle. </a:t>
+            </a:r>
+            <a:pPr algn="l" indent="0" marL="0">
+              <a:lnSpc>
+                <a:spcPts val="1680"/>
+              </a:lnSpc>
+              <a:spcBef>
+                <a:spcPts val="300"/>
+              </a:spcBef>
+              <a:spcAft>
+                <a:spcPts val="300"/>
+              </a:spcAft>
+              <a:buNone/>
+            </a:pPr>
+            <a:r>
+              <a:rPr lang="en-US" sz="1200" i="1" dirty="0">
+                <a:solidFill>
+                  <a:srgbClr val="2C2C2C"/>
+                </a:solidFill>
+                <a:latin typeface="Verdana" pitchFamily="34" charset="0"/>
+                <a:ea typeface="Verdana" pitchFamily="34" charset="-122"/>
+                <a:cs typeface="Verdana" pitchFamily="34" charset="-120"/>
+              </a:rPr>
+              <a:t>"That was your Vāta friend being LOUD. When Vāta is loud, we feel quick, talkative, sometimes worried."</a:t>
+            </a:r>
+            <a:endParaRPr lang="en-US" sz="1200" dirty="0"/>
+          </a:p>
+        </p:txBody>
+      </p:sp>
+      <p:sp>
+        <p:nvSpPr>
+          <p:cNvPr id="7" name="Text 5"/>
           <p:cNvSpPr/>
           <p:nvPr/>
         </p:nvSpPr>
@@ -3891,7 +4404,7 @@
                 <a:ea typeface="Georgia" pitchFamily="34" charset="-122"/>
                 <a:cs typeface="Georgia" pitchFamily="34" charset="-120"/>
               </a:rPr>
-              <a:t>Show + chant (2 min)</a:t>
+              <a:t>Vāta game (15 min) (cont.)</a:t>
             </a:r>
             <a:endParaRPr lang="en-US" sz="1800" dirty="0"/>
           </a:p>
@@ -3900,6 +4413,54 @@
       <p:sp>
         <p:nvSpPr>
           <p:cNvPr id="4" name="Text 2"/>
+          <p:cNvSpPr/>
+          <p:nvPr/>
+        </p:nvSpPr>
+        <p:spPr>
+          <a:xfrm>
+            <a:off x="406301" y="870942"/>
+            <a:ext cx="8498026" cy="213271"/>
+          </a:xfrm>
+          <a:prstGeom prst="rect">
+            <a:avLst/>
+          </a:prstGeom>
+          <a:noFill/>
+          <a:ln/>
+        </p:spPr>
+        <p:txBody>
+          <a:bodyPr wrap="square" lIns="0" tIns="0" rIns="0" bIns="0" rtlCol="0" anchor="t"/>
+          <a:lstStyle/>
+          <a:p>
+            <a:pPr algn="l" indent="0" marL="0">
+              <a:lnSpc>
+                <a:spcPts val="1680"/>
+              </a:lnSpc>
+              <a:spcBef>
+                <a:spcPts val="300"/>
+              </a:spcBef>
+              <a:spcAft>
+                <a:spcPts val="300"/>
+              </a:spcAft>
+              <a:buNone/>
+            </a:pPr>
+            <a:r>
+              <a:rPr lang="en-US" sz="1200" i="1" dirty="0">
+                <a:solidFill>
+                  <a:srgbClr val="2C2C2C"/>
+                </a:solidFill>
+                <a:latin typeface="Verdana" pitchFamily="34" charset="0"/>
+                <a:ea typeface="Verdana" pitchFamily="34" charset="-122"/>
+                <a:cs typeface="Verdana" pitchFamily="34" charset="-120"/>
+              </a:rPr>
+              <a:t>"To calm Vāta: SLOW breath. Warm food. Sit still. Hug something soft."</a:t>
+            </a:r>
+            <a:endParaRPr lang="en-US" sz="1200" dirty="0"/>
+          </a:p>
+        </p:txBody>
+      </p:sp>
+      <p:sp>
+        <p:nvSpPr>
+          <p:cNvPr id="5" name="Text 3"/>
           <p:cNvSpPr/>
           <p:nvPr/>
         </p:nvSpPr>
@@ -4049,7 +4610,7 @@
                 <a:ea typeface="Georgia" pitchFamily="34" charset="-122"/>
                 <a:cs typeface="Georgia" pitchFamily="34" charset="-120"/>
               </a:rPr>
-              <a:t>Homework</a:t>
+              <a:t>Drawing (5 min)</a:t>
             </a:r>
             <a:endParaRPr lang="en-US" sz="1800" dirty="0"/>
           </a:p>
@@ -4097,7 +4658,7 @@
                 <a:ea typeface="Verdana" pitchFamily="34" charset="-122"/>
                 <a:cs typeface="Verdana" pitchFamily="34" charset="-120"/>
               </a:rPr>
-              <a:t>– Notice tonight: when does YOUR Vāta seem loud? (Before sleep? When excited?)</a:t>
+              <a:t>Draw your Vāta friend doing something quick.</a:t>
             </a:r>
             <a:endParaRPr lang="en-US" sz="1200" dirty="0"/>
           </a:p>
